--- a/deliverables/Final Presentation.pptx
+++ b/deliverables/Final Presentation.pptx
@@ -8588,36 +8588,99 @@
               <a:buNone/>
             </a:pPr>
             <a:r>
+              <a:rPr lang="en-DE" sz="1300" b="0" i="0" u="none" strike="noStrike" dirty="0">
+                <a:solidFill>
+                  <a:schemeClr val="accent1">
+                    <a:lumMod val="20000"/>
+                    <a:lumOff val="80000"/>
+                  </a:schemeClr>
+                </a:solidFill>
+                <a:effectLst/>
+                <a:latin typeface="Calibri" panose="020F0502020204030204" pitchFamily="34" charset="0"/>
+                <a:cs typeface="Calibri" panose="020F0502020204030204" pitchFamily="34" charset="0"/>
+              </a:rPr>
+              <a:t>Upload audio or paste a transcript. The outcome: a 2-sentence summary, key takeaways tagged </a:t>
+            </a:r>
+            <a:r>
+              <a:rPr lang="en-DE" sz="1300" b="0" i="1" u="none" strike="noStrike" dirty="0">
+                <a:solidFill>
+                  <a:schemeClr val="accent1">
+                    <a:lumMod val="20000"/>
+                    <a:lumOff val="80000"/>
+                  </a:schemeClr>
+                </a:solidFill>
+                <a:effectLst/>
+                <a:latin typeface="Calibri" panose="020F0502020204030204" pitchFamily="34" charset="0"/>
+                <a:cs typeface="Calibri" panose="020F0502020204030204" pitchFamily="34" charset="0"/>
+              </a:rPr>
+              <a:t>decision</a:t>
+            </a:r>
+            <a:r>
+              <a:rPr lang="en-DE" sz="1300" b="0" i="0" u="none" strike="noStrike" dirty="0">
+                <a:solidFill>
+                  <a:schemeClr val="accent1">
+                    <a:lumMod val="20000"/>
+                    <a:lumOff val="80000"/>
+                  </a:schemeClr>
+                </a:solidFill>
+                <a:effectLst/>
+                <a:latin typeface="Calibri" panose="020F0502020204030204" pitchFamily="34" charset="0"/>
+                <a:cs typeface="Calibri" panose="020F0502020204030204" pitchFamily="34" charset="0"/>
+              </a:rPr>
+              <a:t> or </a:t>
+            </a:r>
+            <a:r>
+              <a:rPr lang="en-DE" sz="1300" b="0" i="1" u="none" strike="noStrike" dirty="0">
+                <a:solidFill>
+                  <a:schemeClr val="accent1">
+                    <a:lumMod val="20000"/>
+                    <a:lumOff val="80000"/>
+                  </a:schemeClr>
+                </a:solidFill>
+                <a:effectLst/>
+                <a:latin typeface="Calibri" panose="020F0502020204030204" pitchFamily="34" charset="0"/>
+                <a:cs typeface="Calibri" panose="020F0502020204030204" pitchFamily="34" charset="0"/>
+              </a:rPr>
+              <a:t>note</a:t>
+            </a:r>
+            <a:r>
+              <a:rPr lang="en-DE" sz="1300" b="0" i="0" u="none" strike="noStrike" dirty="0">
+                <a:solidFill>
+                  <a:schemeClr val="accent1">
+                    <a:lumMod val="20000"/>
+                    <a:lumOff val="80000"/>
+                  </a:schemeClr>
+                </a:solidFill>
+                <a:effectLst/>
+                <a:latin typeface="Calibri" panose="020F0502020204030204" pitchFamily="34" charset="0"/>
+                <a:cs typeface="Calibri" panose="020F0502020204030204" pitchFamily="34" charset="0"/>
+              </a:rPr>
+              <a:t>, and action items with owner and deadline.</a:t>
+            </a:r>
+            <a:r>
               <a:rPr lang="en-US" sz="1300" dirty="0">
                 <a:solidFill>
-                  <a:srgbClr val="C4C9DF"/>
-                </a:solidFill>
-                <a:latin typeface="Calibri" pitchFamily="34" charset="0"/>
+                  <a:schemeClr val="accent1">
+                    <a:lumMod val="20000"/>
+                    <a:lumOff val="80000"/>
+                  </a:schemeClr>
+                </a:solidFill>
+                <a:latin typeface="Calibri" panose="020F0502020204030204" pitchFamily="34" charset="0"/>
                 <a:ea typeface="Calibri" pitchFamily="34" charset="-122"/>
-                <a:cs typeface="Calibri" pitchFamily="34" charset="-120"/>
-              </a:rPr>
-              <a:t>Upload audio or paste a transcript. Out comes a 2 sentence summary, key takeaways tagged decision or note and action items with owner + deadline</a:t>
-            </a:r>
-          </a:p>
-          <a:p>
-            <a:pPr marL="0" indent="0">
-              <a:lnSpc>
-                <a:spcPct val="110000"/>
-              </a:lnSpc>
-              <a:buNone/>
-            </a:pPr>
-            <a:r>
-              <a:rPr lang="en-US" sz="1300" dirty="0">
-                <a:solidFill>
-                  <a:srgbClr val="C4C9DF"/>
-                </a:solidFill>
-                <a:latin typeface="Calibri" pitchFamily="34" charset="0"/>
-                <a:ea typeface="Calibri" pitchFamily="34" charset="-122"/>
-                <a:cs typeface="Calibri" pitchFamily="34" charset="-120"/>
-              </a:rPr>
-              <a:t>-&gt; only when actually said</a:t>
-            </a:r>
-            <a:endParaRPr lang="en-US" sz="1300" dirty="0"/>
+                <a:cs typeface="Calibri" panose="020F0502020204030204" pitchFamily="34" charset="0"/>
+              </a:rPr>
+              <a:t>-&gt; --&gt; only when actually said</a:t>
+            </a:r>
+            <a:endParaRPr lang="en-US" sz="1300" dirty="0">
+              <a:solidFill>
+                <a:schemeClr val="accent1">
+                  <a:lumMod val="20000"/>
+                  <a:lumOff val="80000"/>
+                </a:schemeClr>
+              </a:solidFill>
+              <a:latin typeface="Calibri" panose="020F0502020204030204" pitchFamily="34" charset="0"/>
+              <a:cs typeface="Calibri" panose="020F0502020204030204" pitchFamily="34" charset="0"/>
+            </a:endParaRPr>
           </a:p>
         </p:txBody>
       </p:sp>
@@ -9122,7 +9185,7 @@
                 <a:ea typeface="Courier New" pitchFamily="34" charset="-122"/>
                 <a:cs typeface="Courier New" pitchFamily="34" charset="-120"/>
               </a:rPr>
-              <a:t>HTML + JS · vibe-coded</a:t>
+              <a:t>HTML + JS </a:t>
             </a:r>
             <a:endParaRPr lang="en-US" sz="950" dirty="0"/>
           </a:p>
@@ -9357,7 +9420,7 @@
         </p:nvSpPr>
         <p:spPr>
           <a:xfrm>
-            <a:off x="6931152" y="1856232"/>
+            <a:off x="6931152" y="1932434"/>
             <a:ext cx="3376879" cy="274320"/>
           </a:xfrm>
           <a:prstGeom prst="rect">
@@ -9415,7 +9478,9 @@
             <a:r>
               <a:rPr lang="en-US" sz="1050" dirty="0">
                 <a:solidFill>
-                  <a:srgbClr val="C4C9DF"/>
+                  <a:schemeClr val="accent1">
+                    <a:lumMod val="50000"/>
+                  </a:schemeClr>
                 </a:solidFill>
                 <a:latin typeface="Calibri" pitchFamily="34" charset="0"/>
                 <a:ea typeface="Calibri" pitchFamily="34" charset="-122"/>
@@ -9423,7 +9488,13 @@
               </a:rPr>
               <a:t>local ASR</a:t>
             </a:r>
-            <a:endParaRPr lang="en-US" sz="1050" dirty="0"/>
+            <a:endParaRPr lang="en-US" sz="1050" dirty="0">
+              <a:solidFill>
+                <a:schemeClr val="accent1">
+                  <a:lumMod val="50000"/>
+                </a:schemeClr>
+              </a:solidFill>
+            </a:endParaRPr>
           </a:p>
         </p:txBody>
       </p:sp>
@@ -9506,7 +9577,7 @@
         </p:nvSpPr>
         <p:spPr>
           <a:xfrm>
-            <a:off x="6931152" y="2633472"/>
+            <a:off x="6931152" y="2709674"/>
             <a:ext cx="3376879" cy="274320"/>
           </a:xfrm>
           <a:prstGeom prst="rect">
@@ -9564,7 +9635,9 @@
             <a:r>
               <a:rPr lang="en-US" sz="1050" dirty="0">
                 <a:solidFill>
-                  <a:srgbClr val="C4C9DF"/>
+                  <a:schemeClr val="accent1">
+                    <a:lumMod val="50000"/>
+                  </a:schemeClr>
                 </a:solidFill>
                 <a:latin typeface="Calibri" pitchFamily="34" charset="0"/>
                 <a:ea typeface="Calibri" pitchFamily="34" charset="-122"/>
@@ -9572,7 +9645,13 @@
               </a:rPr>
               <a:t>summarise + agent</a:t>
             </a:r>
-            <a:endParaRPr lang="en-US" sz="1050" dirty="0"/>
+            <a:endParaRPr lang="en-US" sz="1050" dirty="0">
+              <a:solidFill>
+                <a:schemeClr val="accent1">
+                  <a:lumMod val="50000"/>
+                </a:schemeClr>
+              </a:solidFill>
+            </a:endParaRPr>
           </a:p>
         </p:txBody>
       </p:sp>
@@ -9655,7 +9734,7 @@
         </p:nvSpPr>
         <p:spPr>
           <a:xfrm>
-            <a:off x="6931152" y="3410712"/>
+            <a:off x="6931152" y="3486914"/>
             <a:ext cx="3376879" cy="274320"/>
           </a:xfrm>
           <a:prstGeom prst="rect">
@@ -9713,7 +9792,9 @@
             <a:r>
               <a:rPr lang="en-US" sz="1050" dirty="0">
                 <a:solidFill>
-                  <a:srgbClr val="C4C9DF"/>
+                  <a:schemeClr val="accent1">
+                    <a:lumMod val="50000"/>
+                  </a:schemeClr>
                 </a:solidFill>
                 <a:latin typeface="Calibri" pitchFamily="34" charset="0"/>
                 <a:ea typeface="Calibri" pitchFamily="34" charset="-122"/>
@@ -9721,7 +9802,13 @@
               </a:rPr>
               <a:t>vectors</a:t>
             </a:r>
-            <a:endParaRPr lang="en-US" sz="1050" dirty="0"/>
+            <a:endParaRPr lang="en-US" sz="1050" dirty="0">
+              <a:solidFill>
+                <a:schemeClr val="accent1">
+                  <a:lumMod val="50000"/>
+                </a:schemeClr>
+              </a:solidFill>
+            </a:endParaRPr>
           </a:p>
         </p:txBody>
       </p:sp>
@@ -9804,7 +9891,7 @@
         </p:nvSpPr>
         <p:spPr>
           <a:xfrm>
-            <a:off x="6931152" y="4187952"/>
+            <a:off x="6931152" y="4264154"/>
             <a:ext cx="3376879" cy="274320"/>
           </a:xfrm>
           <a:prstGeom prst="rect">
@@ -9862,7 +9949,9 @@
             <a:r>
               <a:rPr lang="en-US" sz="1050" dirty="0">
                 <a:solidFill>
-                  <a:srgbClr val="C4C9DF"/>
+                  <a:schemeClr val="accent1">
+                    <a:lumMod val="50000"/>
+                  </a:schemeClr>
                 </a:solidFill>
                 <a:latin typeface="Calibri" pitchFamily="34" charset="0"/>
                 <a:ea typeface="Calibri" pitchFamily="34" charset="-122"/>
@@ -9870,7 +9959,13 @@
               </a:rPr>
               <a:t>store + search</a:t>
             </a:r>
-            <a:endParaRPr lang="en-US" sz="1050" dirty="0"/>
+            <a:endParaRPr lang="en-US" sz="1050" dirty="0">
+              <a:solidFill>
+                <a:schemeClr val="accent1">
+                  <a:lumMod val="50000"/>
+                </a:schemeClr>
+              </a:solidFill>
+            </a:endParaRPr>
           </a:p>
         </p:txBody>
       </p:sp>
